--- a/6 ACT AW - SDR.pptx
+++ b/6 ACT AW - SDR.pptx
@@ -5116,7 +5116,7 @@
           <a:p>
             <a:fld id="{2FC2648E-2733-4EC8-BEDA-1577DE2D3D01}" type="datetimeFigureOut">
               <a:rPr lang="en-US" smtClean="0"/>
-              <a:t>9/4/2026</a:t>
+              <a:t>10/15/2026</a:t>
             </a:fld>
             <a:endParaRPr lang="en-US"/>
           </a:p>
@@ -6375,7 +6375,7 @@
           <a:p>
             <a:fld id="{8CF61943-3342-4554-8403-118C8C1529D5}" type="datetimeFigureOut">
               <a:rPr lang="en-US" smtClean="0"/>
-              <a:t>9/4/2026</a:t>
+              <a:t>10/15/2026</a:t>
             </a:fld>
             <a:endParaRPr lang="en-US"/>
           </a:p>
@@ -6738,7 +6738,7 @@
           <a:p>
             <a:fld id="{8CF61943-3342-4554-8403-118C8C1529D5}" type="datetimeFigureOut">
               <a:rPr lang="en-US" smtClean="0"/>
-              <a:t>9/4/2026</a:t>
+              <a:t>10/15/2026</a:t>
             </a:fld>
             <a:endParaRPr lang="en-US"/>
           </a:p>
@@ -33669,118 +33669,118 @@
           <a:lstStyle/>
           <a:p>
             <a:r>
-              <a:rPr lang="en-US" altLang="ja-JP" sz="1600" dirty="0"/>
+              <a:rPr lang="en-US" altLang="ja-JP" sz="2000" dirty="0"/>
               <a:t>Software Defined Radios (SDR)</a:t>
             </a:r>
           </a:p>
           <a:p>
             <a:pPr lvl="1"/>
             <a:r>
-              <a:rPr lang="en-US" altLang="ja-JP" sz="1400" dirty="0">
+              <a:rPr lang="en-US" altLang="ja-JP" sz="1800" dirty="0">
                 <a:hlinkClick r:id="rId3"/>
               </a:rPr>
               <a:t>https://en.wikipedia.org/wiki/Software-defined_radio</a:t>
             </a:r>
-            <a:endParaRPr lang="en-US" altLang="ja-JP" sz="1400" dirty="0"/>
+            <a:endParaRPr lang="en-US" altLang="ja-JP" sz="1800" dirty="0"/>
           </a:p>
           <a:p>
             <a:pPr lvl="1"/>
             <a:r>
-              <a:rPr lang="en-US" altLang="ja-JP" sz="1400" dirty="0">
+              <a:rPr lang="en-US" altLang="ja-JP" sz="1800" dirty="0">
                 <a:hlinkClick r:id="rId4"/>
               </a:rPr>
               <a:t>http://www.arrl.org/software-defined-radio</a:t>
             </a:r>
-            <a:endParaRPr lang="en-US" altLang="ja-JP" sz="1400" dirty="0"/>
+            <a:endParaRPr lang="en-US" altLang="ja-JP" sz="1800" dirty="0"/>
           </a:p>
           <a:p>
             <a:pPr lvl="1"/>
             <a:r>
-              <a:rPr lang="en-US" altLang="ja-JP" sz="1400" dirty="0"/>
+              <a:rPr lang="en-US" altLang="ja-JP" sz="1800" dirty="0"/>
               <a:t>Not limited by single purpose hardware</a:t>
             </a:r>
           </a:p>
           <a:p>
             <a:pPr lvl="1"/>
             <a:r>
-              <a:rPr lang="en-US" altLang="ja-JP" sz="1400" dirty="0"/>
+              <a:rPr lang="en-US" altLang="ja-JP" sz="1800" dirty="0"/>
               <a:t>Various software packages</a:t>
             </a:r>
           </a:p>
           <a:p>
             <a:pPr lvl="1"/>
             <a:r>
-              <a:rPr lang="en-US" altLang="ja-JP" sz="1400" dirty="0"/>
+              <a:rPr lang="en-US" altLang="ja-JP" sz="1800" dirty="0"/>
               <a:t>Use to sniff and diagnose wireless data and frequencies</a:t>
             </a:r>
           </a:p>
           <a:p>
             <a:pPr lvl="1"/>
             <a:r>
-              <a:rPr lang="en-US" altLang="ja-JP" sz="1400" dirty="0"/>
+              <a:rPr lang="en-US" altLang="ja-JP" sz="1800" dirty="0"/>
               <a:t>Can be used to decode and encode data</a:t>
             </a:r>
           </a:p>
           <a:p>
             <a:pPr lvl="1"/>
             <a:r>
-              <a:rPr lang="en-US" altLang="ja-JP" sz="1400" dirty="0"/>
+              <a:rPr lang="en-US" altLang="ja-JP" sz="1800" dirty="0"/>
               <a:t>Can also be used to transmit data for testing or spoofing</a:t>
             </a:r>
           </a:p>
           <a:p>
             <a:pPr lvl="1"/>
             <a:r>
-              <a:rPr lang="en-US" altLang="ja-JP" sz="1400" dirty="0"/>
+              <a:rPr lang="en-US" altLang="ja-JP" sz="1800" dirty="0"/>
               <a:t>Popular with engineers and hackers</a:t>
             </a:r>
           </a:p>
           <a:p>
             <a:pPr lvl="1"/>
             <a:r>
-              <a:rPr lang="en-US" altLang="ja-JP" sz="1400" dirty="0"/>
+              <a:rPr lang="en-US" altLang="ja-JP" sz="1800" dirty="0"/>
               <a:t>Freedom of access to RF spectrum</a:t>
             </a:r>
           </a:p>
           <a:p>
             <a:pPr lvl="1"/>
             <a:r>
-              <a:rPr lang="en-US" altLang="ja-JP" sz="1400" dirty="0"/>
+              <a:rPr lang="en-US" altLang="ja-JP" sz="1800" dirty="0"/>
               <a:t>Exposes protocols previously inaccessible</a:t>
             </a:r>
           </a:p>
           <a:p>
             <a:pPr lvl="1"/>
             <a:r>
-              <a:rPr lang="en-US" altLang="ja-JP" sz="1400" dirty="0"/>
+              <a:rPr lang="en-US" altLang="ja-JP" sz="1800" dirty="0"/>
               <a:t>Hugely flexible, but requires a lot of work</a:t>
             </a:r>
           </a:p>
           <a:p>
             <a:pPr lvl="1"/>
             <a:r>
-              <a:rPr lang="en-US" altLang="ja-JP" sz="1400" dirty="0"/>
+              <a:rPr lang="en-US" altLang="ja-JP" sz="1800" dirty="0"/>
               <a:t>Requires programming and real-time signal processing</a:t>
             </a:r>
           </a:p>
           <a:p>
             <a:pPr lvl="2"/>
             <a:r>
-              <a:rPr lang="en-US" altLang="ja-JP" sz="1200" dirty="0"/>
+              <a:rPr lang="en-US" altLang="ja-JP" sz="1600" dirty="0"/>
               <a:t>FFT, Spectrum</a:t>
             </a:r>
           </a:p>
           <a:p>
             <a:pPr lvl="2"/>
             <a:r>
-              <a:rPr lang="en-US" altLang="ja-JP" sz="1200" dirty="0"/>
+              <a:rPr lang="en-US" altLang="ja-JP" sz="1600" dirty="0"/>
               <a:t>Waterfall display</a:t>
             </a:r>
           </a:p>
           <a:p>
             <a:pPr lvl="1"/>
             <a:r>
-              <a:rPr lang="en-US" altLang="ja-JP" sz="1400" dirty="0"/>
+              <a:rPr lang="en-US" altLang="ja-JP" sz="1800" dirty="0"/>
               <a:t>Not a first avenue of attack</a:t>
             </a:r>
           </a:p>
@@ -33869,294 +33869,293 @@
         </p:spPr>
         <p:txBody>
           <a:bodyPr>
-            <a:normAutofit fontScale="70000" lnSpcReduction="20000"/>
+            <a:normAutofit fontScale="32500" lnSpcReduction="20000"/>
           </a:bodyPr>
           <a:lstStyle/>
           <a:p>
             <a:r>
-              <a:rPr lang="en-US" altLang="ja-JP" sz="1700" dirty="0"/>
+              <a:rPr lang="en-US" altLang="ja-JP" sz="3100" dirty="0"/>
               <a:t>Hardware</a:t>
             </a:r>
           </a:p>
           <a:p>
             <a:pPr lvl="1"/>
             <a:r>
-              <a:rPr lang="en-US" altLang="ja-JP" sz="1500" dirty="0"/>
+              <a:rPr lang="en-US" altLang="ja-JP" sz="3100" dirty="0"/>
               <a:t>Choices to fit specific applications</a:t>
             </a:r>
           </a:p>
           <a:p>
             <a:pPr lvl="1"/>
             <a:r>
-              <a:rPr lang="en-US" altLang="ja-JP" sz="1500" dirty="0">
+              <a:rPr lang="en-US" altLang="ja-JP" sz="3100" dirty="0">
                 <a:hlinkClick r:id="rId3"/>
               </a:rPr>
               <a:t>https://www.rtl-sdr.com/roundup-software-defined-radios/</a:t>
             </a:r>
-            <a:endParaRPr lang="en-US" altLang="ja-JP" sz="1500" dirty="0"/>
+            <a:endParaRPr lang="en-US" altLang="ja-JP" sz="3100" dirty="0"/>
           </a:p>
           <a:p>
             <a:pPr lvl="1"/>
             <a:r>
-              <a:rPr lang="en-US" altLang="ja-JP" sz="1500" dirty="0"/>
+              <a:rPr lang="en-US" altLang="ja-JP" sz="3100" dirty="0"/>
               <a:t>Cheap, usually under $500</a:t>
             </a:r>
           </a:p>
           <a:p>
             <a:pPr lvl="1"/>
             <a:r>
-              <a:rPr lang="en-US" altLang="ja-JP" sz="1500" dirty="0"/>
+              <a:rPr lang="en-US" altLang="ja-JP" sz="3100" dirty="0"/>
               <a:t>Usually multi-platform and open source support</a:t>
             </a:r>
           </a:p>
           <a:p>
             <a:pPr lvl="1"/>
             <a:r>
-              <a:rPr lang="en-US" altLang="ja-JP" sz="1500" dirty="0"/>
+              <a:rPr lang="en-US" altLang="ja-JP" sz="3100" dirty="0"/>
               <a:t>RTL-SDR</a:t>
             </a:r>
           </a:p>
           <a:p>
             <a:pPr lvl="2"/>
             <a:r>
-              <a:rPr lang="en-US" altLang="ja-JP" sz="1300" dirty="0"/>
+              <a:rPr lang="en-US" altLang="ja-JP" sz="3100" dirty="0"/>
               <a:t>Cheapest, but RX only ($10-20)</a:t>
             </a:r>
           </a:p>
           <a:p>
             <a:pPr lvl="2"/>
             <a:r>
-              <a:rPr lang="en-US" altLang="ja-JP" sz="1400" dirty="0">
+              <a:rPr lang="en-US" altLang="ja-JP" sz="3100" dirty="0">
                 <a:hlinkClick r:id="rId3"/>
               </a:rPr>
               <a:t>https://www.rtl-sdr.com</a:t>
             </a:r>
             <a:r>
-              <a:rPr lang="en-US" altLang="ja-JP" sz="1400" dirty="0"/>
+              <a:rPr lang="en-US" altLang="ja-JP" sz="3100" dirty="0"/>
               <a:t>/</a:t>
             </a:r>
-            <a:endParaRPr lang="en-US" altLang="ja-JP" sz="1300" dirty="0"/>
           </a:p>
           <a:p>
             <a:pPr lvl="2"/>
             <a:r>
-              <a:rPr lang="en-US" altLang="ja-JP" sz="1300" dirty="0"/>
+              <a:rPr lang="en-US" altLang="ja-JP" sz="3100" dirty="0"/>
               <a:t>Originally for DVB-T TV tuning</a:t>
             </a:r>
           </a:p>
           <a:p>
             <a:pPr lvl="1"/>
             <a:r>
-              <a:rPr lang="en-US" altLang="ja-JP" sz="1500" dirty="0" err="1"/>
+              <a:rPr lang="en-US" altLang="ja-JP" sz="3100" dirty="0" err="1"/>
               <a:t>HackRF</a:t>
             </a:r>
             <a:r>
-              <a:rPr lang="en-US" altLang="ja-JP" sz="1500" dirty="0"/>
+              <a:rPr lang="en-US" altLang="ja-JP" sz="3100" dirty="0"/>
               <a:t> &amp; YARD Stick One</a:t>
             </a:r>
           </a:p>
           <a:p>
             <a:pPr lvl="2"/>
             <a:r>
-              <a:rPr lang="en-US" altLang="ja-JP" sz="1300" dirty="0"/>
+              <a:rPr lang="en-US" altLang="ja-JP" sz="3100" dirty="0"/>
               <a:t>Michael </a:t>
             </a:r>
             <a:r>
-              <a:rPr lang="en-US" altLang="ja-JP" sz="1300" dirty="0" err="1"/>
+              <a:rPr lang="en-US" altLang="ja-JP" sz="3100" dirty="0" err="1"/>
               <a:t>Ossman</a:t>
             </a:r>
-            <a:endParaRPr lang="en-US" altLang="ja-JP" sz="1300" dirty="0"/>
+            <a:endParaRPr lang="en-US" altLang="ja-JP" sz="3100" dirty="0"/>
           </a:p>
           <a:p>
             <a:pPr lvl="2"/>
             <a:r>
-              <a:rPr lang="en-US" altLang="ja-JP" sz="1300" dirty="0">
+              <a:rPr lang="en-US" altLang="ja-JP" sz="3100" dirty="0">
                 <a:hlinkClick r:id="rId4"/>
               </a:rPr>
               <a:t>https://greatscottgadgets.com/hackrf/</a:t>
             </a:r>
-            <a:endParaRPr lang="en-US" altLang="ja-JP" sz="1300" dirty="0"/>
+            <a:endParaRPr lang="en-US" altLang="ja-JP" sz="3100" dirty="0"/>
           </a:p>
           <a:p>
             <a:pPr lvl="2"/>
             <a:r>
-              <a:rPr lang="en-US" altLang="ja-JP" sz="1300" dirty="0"/>
+              <a:rPr lang="en-US" altLang="ja-JP" sz="3100" dirty="0"/>
               <a:t>Teaches </a:t>
             </a:r>
             <a:r>
-              <a:rPr lang="en-US" altLang="ja-JP" sz="1300" dirty="0" err="1"/>
+              <a:rPr lang="en-US" altLang="ja-JP" sz="3100" dirty="0" err="1"/>
               <a:t>BlackHat</a:t>
             </a:r>
             <a:r>
-              <a:rPr lang="en-US" altLang="ja-JP" sz="1300" dirty="0"/>
+              <a:rPr lang="en-US" altLang="ja-JP" sz="3100" dirty="0"/>
               <a:t> class</a:t>
             </a:r>
           </a:p>
           <a:p>
             <a:pPr lvl="1"/>
             <a:r>
-              <a:rPr lang="en-US" altLang="ja-JP" sz="1500" dirty="0" err="1"/>
+              <a:rPr lang="en-US" altLang="ja-JP" sz="3100" dirty="0" err="1"/>
               <a:t>BladeRF</a:t>
             </a:r>
-            <a:endParaRPr lang="en-US" altLang="ja-JP" sz="1500" dirty="0"/>
+            <a:endParaRPr lang="en-US" altLang="ja-JP" sz="3100" dirty="0"/>
           </a:p>
           <a:p>
             <a:pPr lvl="2"/>
             <a:r>
-              <a:rPr lang="en-US" altLang="ja-JP" sz="1300" dirty="0"/>
+              <a:rPr lang="en-US" altLang="ja-JP" sz="3100" dirty="0"/>
               <a:t>40MHz bandwidth</a:t>
             </a:r>
           </a:p>
           <a:p>
             <a:pPr lvl="2"/>
             <a:r>
-              <a:rPr lang="en-US" altLang="ja-JP" sz="1300" dirty="0">
+              <a:rPr lang="en-US" altLang="ja-JP" sz="3100" dirty="0">
                 <a:hlinkClick r:id="rId5"/>
               </a:rPr>
               <a:t>https://www.nuand.com/</a:t>
             </a:r>
-            <a:endParaRPr lang="en-US" altLang="ja-JP" sz="1300" dirty="0"/>
+            <a:endParaRPr lang="en-US" altLang="ja-JP" sz="3100" dirty="0"/>
           </a:p>
           <a:p>
             <a:pPr lvl="2"/>
             <a:r>
-              <a:rPr lang="en-US" altLang="ja-JP" sz="1300" dirty="0" err="1"/>
+              <a:rPr lang="en-US" altLang="ja-JP" sz="3100" dirty="0" err="1"/>
               <a:t>OpenBTS</a:t>
             </a:r>
             <a:r>
-              <a:rPr lang="en-US" altLang="ja-JP" sz="1300" dirty="0"/>
+              <a:rPr lang="en-US" altLang="ja-JP" sz="3100" dirty="0"/>
               <a:t> and </a:t>
             </a:r>
             <a:r>
-              <a:rPr lang="en-US" altLang="ja-JP" sz="1300" dirty="0" err="1"/>
+              <a:rPr lang="en-US" altLang="ja-JP" sz="3100" dirty="0" err="1"/>
               <a:t>OpenLTE</a:t>
             </a:r>
             <a:r>
-              <a:rPr lang="en-US" altLang="ja-JP" sz="1300" dirty="0"/>
+              <a:rPr lang="en-US" altLang="ja-JP" sz="3100" dirty="0"/>
               <a:t> support</a:t>
             </a:r>
           </a:p>
           <a:p>
             <a:pPr lvl="1"/>
             <a:r>
-              <a:rPr lang="en-US" altLang="ja-JP" sz="1500" dirty="0" err="1"/>
+              <a:rPr lang="en-US" altLang="ja-JP" sz="3100" dirty="0" err="1"/>
               <a:t>LimeSDR</a:t>
             </a:r>
             <a:r>
-              <a:rPr lang="en-US" altLang="ja-JP" sz="1500" dirty="0"/>
+              <a:rPr lang="en-US" altLang="ja-JP" sz="3100" dirty="0"/>
               <a:t> &amp; </a:t>
             </a:r>
             <a:r>
-              <a:rPr lang="en-US" altLang="ja-JP" sz="1500" dirty="0" err="1"/>
+              <a:rPr lang="en-US" altLang="ja-JP" sz="3100" dirty="0" err="1"/>
               <a:t>LimeSDR</a:t>
             </a:r>
             <a:r>
-              <a:rPr lang="en-US" altLang="ja-JP" sz="1500" dirty="0"/>
+              <a:rPr lang="en-US" altLang="ja-JP" sz="3100" dirty="0"/>
               <a:t> Mini</a:t>
             </a:r>
           </a:p>
           <a:p>
             <a:pPr lvl="2"/>
             <a:r>
-              <a:rPr lang="en-US" altLang="ja-JP" sz="1300" dirty="0"/>
+              <a:rPr lang="en-US" altLang="ja-JP" sz="3100" dirty="0"/>
               <a:t>Crowd sourced</a:t>
             </a:r>
           </a:p>
           <a:p>
             <a:pPr lvl="2"/>
             <a:r>
-              <a:rPr lang="en-US" altLang="ja-JP" sz="1300" dirty="0">
+              <a:rPr lang="en-US" altLang="ja-JP" sz="3100" dirty="0">
                 <a:hlinkClick r:id="rId6"/>
               </a:rPr>
               <a:t>https://www.crowdsupply.com/lime-micro/limesdr-mini</a:t>
             </a:r>
-            <a:endParaRPr lang="en-US" altLang="ja-JP" sz="1300" dirty="0"/>
+            <a:endParaRPr lang="en-US" altLang="ja-JP" sz="3100" dirty="0"/>
           </a:p>
           <a:p>
             <a:pPr lvl="2"/>
             <a:r>
-              <a:rPr lang="en-US" altLang="ja-JP" sz="1300" dirty="0"/>
+              <a:rPr lang="en-US" altLang="ja-JP" sz="3100" dirty="0"/>
               <a:t>Full duplex</a:t>
             </a:r>
           </a:p>
           <a:p>
             <a:pPr lvl="1"/>
             <a:r>
-              <a:rPr lang="en-US" altLang="ja-JP" sz="1500" dirty="0" err="1"/>
+              <a:rPr lang="en-US" altLang="ja-JP" sz="3100" dirty="0" err="1"/>
               <a:t>Airspy</a:t>
             </a:r>
-            <a:endParaRPr lang="en-US" altLang="ja-JP" sz="1500" dirty="0"/>
+            <a:endParaRPr lang="en-US" altLang="ja-JP" sz="3100" dirty="0"/>
           </a:p>
           <a:p>
             <a:pPr lvl="2"/>
             <a:r>
-              <a:rPr lang="en-US" altLang="ja-JP" sz="1300" dirty="0"/>
+              <a:rPr lang="en-US" altLang="ja-JP" sz="3100" dirty="0"/>
               <a:t>RTL-SDR features</a:t>
             </a:r>
           </a:p>
           <a:p>
             <a:pPr lvl="2"/>
             <a:r>
-              <a:rPr lang="en-US" altLang="ja-JP" sz="1300" dirty="0">
+              <a:rPr lang="en-US" altLang="ja-JP" sz="3100" dirty="0">
                 <a:hlinkClick r:id="rId7"/>
               </a:rPr>
               <a:t>https://airspy.com/</a:t>
             </a:r>
-            <a:endParaRPr lang="en-US" altLang="ja-JP" sz="1300" dirty="0"/>
+            <a:endParaRPr lang="en-US" altLang="ja-JP" sz="3100" dirty="0"/>
           </a:p>
           <a:p>
             <a:pPr lvl="2"/>
             <a:r>
-              <a:rPr lang="en-US" altLang="ja-JP" sz="1300" dirty="0"/>
+              <a:rPr lang="en-US" altLang="ja-JP" sz="3100" dirty="0"/>
               <a:t>RX only, fast scanning</a:t>
             </a:r>
           </a:p>
           <a:p>
             <a:pPr lvl="1"/>
             <a:r>
-              <a:rPr lang="en-US" altLang="ja-JP" sz="1500" dirty="0"/>
+              <a:rPr lang="en-US" altLang="ja-JP" sz="3100" dirty="0"/>
               <a:t>Ettus</a:t>
             </a:r>
           </a:p>
           <a:p>
             <a:pPr lvl="2"/>
             <a:r>
-              <a:rPr lang="en-US" altLang="ja-JP" sz="1300" dirty="0"/>
+              <a:rPr lang="en-US" altLang="ja-JP" sz="3100" dirty="0"/>
               <a:t>Commercial product</a:t>
             </a:r>
           </a:p>
           <a:p>
             <a:pPr lvl="1"/>
             <a:r>
-              <a:rPr lang="en-US" altLang="ja-JP" sz="1500" dirty="0" err="1"/>
+              <a:rPr lang="en-US" altLang="ja-JP" sz="3100" dirty="0" err="1"/>
               <a:t>SDRPlay</a:t>
             </a:r>
             <a:r>
-              <a:rPr lang="en-US" altLang="ja-JP" sz="1500" dirty="0"/>
+              <a:rPr lang="en-US" altLang="ja-JP" sz="3100" dirty="0"/>
               <a:t> RSP*</a:t>
             </a:r>
           </a:p>
           <a:p>
             <a:pPr lvl="2"/>
             <a:r>
-              <a:rPr lang="en-US" altLang="ja-JP" sz="1300" dirty="0">
+              <a:rPr lang="en-US" altLang="ja-JP" sz="3100" dirty="0">
                 <a:hlinkClick r:id="rId8"/>
               </a:rPr>
               <a:t>https://www.sdrplay.com/</a:t>
             </a:r>
-            <a:endParaRPr lang="en-US" altLang="ja-JP" sz="1300" dirty="0"/>
+            <a:endParaRPr lang="en-US" altLang="ja-JP" sz="3100" dirty="0"/>
           </a:p>
           <a:p>
             <a:pPr lvl="1"/>
             <a:r>
-              <a:rPr lang="en-US" altLang="ja-JP" sz="1500" dirty="0"/>
+              <a:rPr lang="en-US" altLang="ja-JP" sz="3100" dirty="0"/>
               <a:t>USRP</a:t>
             </a:r>
           </a:p>
           <a:p>
             <a:pPr lvl="2"/>
             <a:r>
-              <a:rPr lang="en-US" altLang="ja-JP" sz="1300" dirty="0"/>
+              <a:rPr lang="en-US" altLang="ja-JP" sz="3100" dirty="0"/>
               <a:t>Oldest SDR, more expensive</a:t>
             </a:r>
           </a:p>
@@ -34248,158 +34247,158 @@
         </p:spPr>
         <p:txBody>
           <a:bodyPr>
-            <a:normAutofit/>
+            <a:normAutofit fontScale="92500" lnSpcReduction="10000"/>
           </a:bodyPr>
           <a:lstStyle/>
           <a:p>
             <a:r>
-              <a:rPr lang="en-US" altLang="ja-JP" sz="1600" dirty="0"/>
+              <a:rPr lang="en-US" altLang="ja-JP" dirty="0"/>
               <a:t>Software</a:t>
             </a:r>
           </a:p>
           <a:p>
             <a:pPr lvl="1"/>
             <a:r>
-              <a:rPr lang="en-US" altLang="ja-JP" sz="1400" dirty="0"/>
+              <a:rPr lang="en-US" altLang="ja-JP" dirty="0"/>
               <a:t>Many software packages available, but those are the most prominent</a:t>
             </a:r>
           </a:p>
           <a:p>
             <a:pPr lvl="1"/>
             <a:r>
-              <a:rPr lang="en-US" altLang="ja-JP" sz="1400" dirty="0"/>
+              <a:rPr lang="en-US" altLang="ja-JP" dirty="0"/>
               <a:t>GNU Radio</a:t>
             </a:r>
           </a:p>
           <a:p>
             <a:pPr lvl="2"/>
             <a:r>
-              <a:rPr lang="en-US" altLang="ja-JP" sz="1200" dirty="0">
+              <a:rPr lang="en-US" altLang="ja-JP" dirty="0">
                 <a:hlinkClick r:id="rId3"/>
               </a:rPr>
               <a:t>https://www.gnuradio.org/</a:t>
             </a:r>
-            <a:endParaRPr lang="en-US" altLang="ja-JP" sz="1200" dirty="0"/>
+            <a:endParaRPr lang="en-US" altLang="ja-JP" dirty="0"/>
           </a:p>
           <a:p>
             <a:pPr lvl="2"/>
             <a:r>
-              <a:rPr lang="en-US" altLang="ja-JP" sz="1200" dirty="0"/>
+              <a:rPr lang="en-US" altLang="ja-JP" dirty="0"/>
               <a:t>Block Diagramming of radio logic</a:t>
             </a:r>
           </a:p>
           <a:p>
             <a:pPr lvl="3"/>
             <a:r>
-              <a:rPr lang="en-US" altLang="ja-JP" sz="1050" dirty="0"/>
+              <a:rPr lang="en-US" altLang="ja-JP" sz="1400" dirty="0"/>
               <a:t>Lots of 3</a:t>
             </a:r>
             <a:r>
-              <a:rPr lang="en-US" altLang="ja-JP" sz="1050" baseline="30000" dirty="0"/>
+              <a:rPr lang="en-US" altLang="ja-JP" sz="1400" baseline="30000" dirty="0"/>
               <a:t>rd</a:t>
             </a:r>
             <a:r>
-              <a:rPr lang="en-US" altLang="ja-JP" sz="1050" dirty="0"/>
+              <a:rPr lang="en-US" altLang="ja-JP" sz="1400" dirty="0"/>
               <a:t> party blocks</a:t>
             </a:r>
           </a:p>
           <a:p>
             <a:pPr lvl="2"/>
             <a:r>
-              <a:rPr lang="en-US" altLang="ja-JP" sz="1250" dirty="0"/>
+              <a:rPr lang="en-US" altLang="ja-JP" dirty="0"/>
               <a:t>Works with most SDRs</a:t>
             </a:r>
           </a:p>
           <a:p>
             <a:pPr lvl="1"/>
             <a:r>
-              <a:rPr lang="en-US" altLang="ja-JP" sz="1400" dirty="0"/>
+              <a:rPr lang="en-US" altLang="ja-JP" dirty="0"/>
               <a:t>GQRX Visualization</a:t>
             </a:r>
           </a:p>
           <a:p>
             <a:pPr lvl="2"/>
             <a:r>
-              <a:rPr lang="en-US" altLang="ja-JP" sz="1200" dirty="0"/>
+              <a:rPr lang="en-US" altLang="ja-JP" dirty="0"/>
               <a:t>Multiplatform</a:t>
             </a:r>
           </a:p>
           <a:p>
             <a:pPr lvl="2"/>
             <a:r>
-              <a:rPr lang="en-US" altLang="ja-JP" sz="1200" dirty="0">
+              <a:rPr lang="en-US" altLang="ja-JP" dirty="0">
                 <a:hlinkClick r:id="rId4"/>
               </a:rPr>
               <a:t>http://gqrx.dk/</a:t>
             </a:r>
-            <a:endParaRPr lang="en-US" altLang="ja-JP" sz="1200" dirty="0"/>
+            <a:endParaRPr lang="en-US" altLang="ja-JP" dirty="0"/>
           </a:p>
           <a:p>
             <a:pPr lvl="2"/>
             <a:r>
-              <a:rPr lang="en-US" altLang="ja-JP" sz="1200" dirty="0"/>
+              <a:rPr lang="en-US" altLang="ja-JP" dirty="0"/>
               <a:t>Spectrum, Waterfall display</a:t>
             </a:r>
           </a:p>
           <a:p>
             <a:pPr lvl="1"/>
             <a:r>
-              <a:rPr lang="en-US" altLang="ja-JP" sz="1400" dirty="0"/>
+              <a:rPr lang="en-US" altLang="ja-JP" dirty="0"/>
               <a:t>SDR-Radio</a:t>
             </a:r>
           </a:p>
           <a:p>
             <a:pPr lvl="2"/>
             <a:r>
-              <a:rPr lang="en-US" altLang="ja-JP" sz="1200" dirty="0">
+              <a:rPr lang="en-US" altLang="ja-JP" dirty="0">
                 <a:hlinkClick r:id="rId5"/>
               </a:rPr>
               <a:t>http://www.sdr-radio.com/</a:t>
             </a:r>
-            <a:endParaRPr lang="en-US" altLang="ja-JP" sz="1200" dirty="0"/>
+            <a:endParaRPr lang="en-US" altLang="ja-JP" dirty="0"/>
           </a:p>
           <a:p>
             <a:pPr lvl="1"/>
             <a:r>
-              <a:rPr lang="en-US" altLang="ja-JP" sz="1400" dirty="0"/>
+              <a:rPr lang="en-US" altLang="ja-JP" dirty="0"/>
               <a:t>SDR# (Windows only)</a:t>
             </a:r>
           </a:p>
           <a:p>
             <a:pPr lvl="2"/>
             <a:r>
-              <a:rPr lang="en-US" altLang="ja-JP" sz="1200" dirty="0"/>
+              <a:rPr lang="en-US" altLang="ja-JP" dirty="0"/>
               <a:t>Real-time FFT, Waterfall display</a:t>
             </a:r>
           </a:p>
           <a:p>
             <a:pPr lvl="2"/>
             <a:r>
-              <a:rPr lang="en-US" altLang="ja-JP" sz="1200" dirty="0">
+              <a:rPr lang="en-US" altLang="ja-JP" dirty="0">
                 <a:hlinkClick r:id="rId6"/>
               </a:rPr>
               <a:t>https://airspy.com/</a:t>
             </a:r>
-            <a:endParaRPr lang="en-US" altLang="ja-JP" sz="1200" dirty="0"/>
+            <a:endParaRPr lang="en-US" altLang="ja-JP" dirty="0"/>
           </a:p>
           <a:p>
             <a:pPr lvl="2"/>
             <a:r>
-              <a:rPr lang="en-US" altLang="ja-JP" sz="1200" dirty="0"/>
+              <a:rPr lang="en-US" altLang="ja-JP" dirty="0"/>
               <a:t>Plug-in support</a:t>
             </a:r>
           </a:p>
           <a:p>
             <a:pPr lvl="2"/>
             <a:r>
-              <a:rPr lang="en-US" altLang="ja-JP" sz="1200" dirty="0"/>
+              <a:rPr lang="en-US" altLang="ja-JP" dirty="0"/>
               <a:t>Closed source</a:t>
             </a:r>
           </a:p>
           <a:p>
             <a:pPr lvl="2"/>
             <a:r>
-              <a:rPr lang="en-US" altLang="ja-JP" sz="1200" dirty="0" err="1"/>
+              <a:rPr lang="en-US" altLang="ja-JP" dirty="0" err="1"/>
               <a:t>AirSpy</a:t>
             </a:r>
             <a:endParaRPr lang="en-US" altLang="ja-JP" sz="1400" dirty="0"/>
@@ -34491,64 +34490,64 @@
           <a:lstStyle/>
           <a:p>
             <a:r>
-              <a:rPr lang="en-US" altLang="ja-JP" sz="1900" dirty="0"/>
+              <a:rPr lang="en-US" altLang="ja-JP" sz="2000" dirty="0"/>
               <a:t>Applications/Examples</a:t>
             </a:r>
           </a:p>
           <a:p>
             <a:pPr lvl="1"/>
             <a:r>
-              <a:rPr lang="en-US" altLang="ja-JP" sz="1500" dirty="0">
+              <a:rPr lang="en-US" altLang="ja-JP" sz="1600" dirty="0">
                 <a:hlinkClick r:id="rId3"/>
               </a:rPr>
               <a:t>https://www.rtl-sdr.com/tag/applications-2/</a:t>
             </a:r>
-            <a:endParaRPr lang="en-US" altLang="ja-JP" sz="1500" dirty="0"/>
+            <a:endParaRPr lang="en-US" altLang="ja-JP" sz="1600" dirty="0"/>
           </a:p>
           <a:p>
             <a:pPr lvl="1"/>
             <a:r>
-              <a:rPr lang="en-US" altLang="ja-JP" sz="1500" dirty="0"/>
+              <a:rPr lang="en-US" altLang="ja-JP" sz="1600" dirty="0"/>
               <a:t>Increasingly used by HAM Radio transceivers</a:t>
             </a:r>
           </a:p>
           <a:p>
             <a:pPr lvl="1"/>
             <a:r>
-              <a:rPr lang="en-US" altLang="ja-JP" sz="1500" dirty="0"/>
+              <a:rPr lang="en-US" altLang="ja-JP" sz="1600" dirty="0"/>
               <a:t>AM/FM Radio</a:t>
             </a:r>
           </a:p>
           <a:p>
             <a:pPr lvl="1"/>
             <a:r>
-              <a:rPr lang="en-US" altLang="ja-JP" sz="1500" dirty="0"/>
+              <a:rPr lang="en-US" altLang="ja-JP" sz="1600" dirty="0"/>
               <a:t>FAA ADS-B Messages</a:t>
             </a:r>
           </a:p>
           <a:p>
             <a:pPr lvl="1"/>
             <a:r>
-              <a:rPr lang="en-US" altLang="ja-JP" sz="1500" dirty="0" err="1"/>
+              <a:rPr lang="en-US" altLang="ja-JP" sz="1600" dirty="0" err="1"/>
               <a:t>Keyfob</a:t>
             </a:r>
             <a:r>
-              <a:rPr lang="en-US" altLang="ja-JP" sz="1500" dirty="0"/>
+              <a:rPr lang="en-US" altLang="ja-JP" sz="1600" dirty="0"/>
               <a:t> hacking</a:t>
             </a:r>
-            <a:endParaRPr lang="en-US" altLang="ja-JP" sz="1300" dirty="0"/>
+            <a:endParaRPr lang="en-US" altLang="ja-JP" sz="1400" dirty="0"/>
           </a:p>
           <a:p>
             <a:pPr lvl="1"/>
             <a:r>
-              <a:rPr lang="en-US" altLang="ja-JP" sz="1500" dirty="0"/>
+              <a:rPr lang="en-US" altLang="ja-JP" sz="1600" dirty="0"/>
               <a:t>Stingray catcher (MITM Rogue Cell tower)</a:t>
             </a:r>
           </a:p>
           <a:p>
             <a:pPr lvl="1"/>
             <a:r>
-              <a:rPr lang="en-US" altLang="ja-JP" sz="1500" dirty="0"/>
+              <a:rPr lang="en-US" altLang="ja-JP" sz="1600" dirty="0"/>
               <a:t>…</a:t>
             </a:r>
           </a:p>
@@ -41320,61 +41319,27 @@
 
 <file path=customXml/item1.xml><?xml version="1.0" encoding="utf-8"?>
 <?mso-contentType ?>
-<spe:Receivers xmlns:spe="http://schemas.microsoft.com/sharepoint/events">
-  <Receiver>
-    <Name>Document ID Generator</Name>
-    <Synchronization>Synchronous</Synchronization>
-    <Type>10001</Type>
-    <SequenceNumber>1000</SequenceNumber>
-    <Url/>
-    <Assembly>Microsoft.Office.DocumentManagement, Version=16.0.0.0, Culture=neutral, PublicKeyToken=71e9bce111e9429c</Assembly>
-    <Class>Microsoft.Office.DocumentManagement.Internal.DocIdHandler</Class>
-    <Data/>
-    <Filter/>
-  </Receiver>
-  <Receiver>
-    <Name>Document ID Generator</Name>
-    <Synchronization>Synchronous</Synchronization>
-    <Type>10002</Type>
-    <SequenceNumber>1001</SequenceNumber>
-    <Url/>
-    <Assembly>Microsoft.Office.DocumentManagement, Version=16.0.0.0, Culture=neutral, PublicKeyToken=71e9bce111e9429c</Assembly>
-    <Class>Microsoft.Office.DocumentManagement.Internal.DocIdHandler</Class>
-    <Data/>
-    <Filter/>
-  </Receiver>
-  <Receiver>
-    <Name>Document ID Generator</Name>
-    <Synchronization>Synchronous</Synchronization>
-    <Type>10004</Type>
-    <SequenceNumber>1002</SequenceNumber>
-    <Url/>
-    <Assembly>Microsoft.Office.DocumentManagement, Version=16.0.0.0, Culture=neutral, PublicKeyToken=71e9bce111e9429c</Assembly>
-    <Class>Microsoft.Office.DocumentManagement.Internal.DocIdHandler</Class>
-    <Data/>
-    <Filter/>
-  </Receiver>
-  <Receiver>
-    <Name>Document ID Generator</Name>
-    <Synchronization>Synchronous</Synchronization>
-    <Type>10006</Type>
-    <SequenceNumber>1003</SequenceNumber>
-    <Url/>
-    <Assembly>Microsoft.Office.DocumentManagement, Version=16.0.0.0, Culture=neutral, PublicKeyToken=71e9bce111e9429c</Assembly>
-    <Class>Microsoft.Office.DocumentManagement.Internal.DocIdHandler</Class>
-    <Data/>
-    <Filter/>
-  </Receiver>
-</spe:Receivers>
-</file>
-
-<file path=customXml/item2.xml><?xml version="1.0" encoding="utf-8"?>
-<?mso-contentType ?>
 <FormTemplates xmlns="http://schemas.microsoft.com/sharepoint/v3/contenttype/forms">
   <Display>DocumentLibraryForm</Display>
   <Edit>DocumentLibraryForm</Edit>
   <New>DocumentLibraryForm</New>
 </FormTemplates>
+</file>
+
+<file path=customXml/item2.xml><?xml version="1.0" encoding="utf-8"?>
+<p:properties xmlns:p="http://schemas.microsoft.com/office/2006/metadata/properties" xmlns:xsi="http://www.w3.org/2001/XMLSchema-instance" xmlns:pc="http://schemas.microsoft.com/office/infopath/2007/PartnerControls">
+  <documentManagement>
+    <_dlc_DocId xmlns="c7a77415-c4a3-4262-8430-671f3e8707b6">7J4PPY27XH2W-901365475-257158</_dlc_DocId>
+    <_dlc_DocIdUrl xmlns="c7a77415-c4a3-4262-8430-671f3e8707b6">
+      <Url>https://automotivei.sharepoint.com/sites/PMO/_layouts/15/DocIdRedir.aspx?ID=7J4PPY27XH2W-901365475-257158</Url>
+      <Description>7J4PPY27XH2W-901365475-257158</Description>
+    </_dlc_DocIdUrl>
+    <TaxCatchAll xmlns="c7a77415-c4a3-4262-8430-671f3e8707b6" xsi:nil="true"/>
+    <lcf76f155ced4ddcb4097134ff3c332f xmlns="69a7259e-7a2c-42d5-bc84-25eccf0dce8b">
+      <Terms xmlns="http://schemas.microsoft.com/office/infopath/2007/PartnerControls"/>
+    </lcf76f155ced4ddcb4097134ff3c332f>
+  </documentManagement>
+</p:properties>
 </file>
 
 <file path=customXml/item3.xml><?xml version="1.0" encoding="utf-8"?>
@@ -41664,33 +41629,70 @@
 </file>
 
 <file path=customXml/item4.xml><?xml version="1.0" encoding="utf-8"?>
-<p:properties xmlns:p="http://schemas.microsoft.com/office/2006/metadata/properties" xmlns:xsi="http://www.w3.org/2001/XMLSchema-instance" xmlns:pc="http://schemas.microsoft.com/office/infopath/2007/PartnerControls">
-  <documentManagement>
-    <_dlc_DocId xmlns="c7a77415-c4a3-4262-8430-671f3e8707b6">7J4PPY27XH2W-901365475-257158</_dlc_DocId>
-    <_dlc_DocIdUrl xmlns="c7a77415-c4a3-4262-8430-671f3e8707b6">
-      <Url>https://automotivei.sharepoint.com/sites/PMO/_layouts/15/DocIdRedir.aspx?ID=7J4PPY27XH2W-901365475-257158</Url>
-      <Description>7J4PPY27XH2W-901365475-257158</Description>
-    </_dlc_DocIdUrl>
-    <TaxCatchAll xmlns="c7a77415-c4a3-4262-8430-671f3e8707b6" xsi:nil="true"/>
-    <lcf76f155ced4ddcb4097134ff3c332f xmlns="69a7259e-7a2c-42d5-bc84-25eccf0dce8b">
-      <Terms xmlns="http://schemas.microsoft.com/office/infopath/2007/PartnerControls"/>
-    </lcf76f155ced4ddcb4097134ff3c332f>
-  </documentManagement>
-</p:properties>
+<?mso-contentType ?>
+<spe:Receivers xmlns:spe="http://schemas.microsoft.com/sharepoint/events">
+  <Receiver>
+    <Name>Document ID Generator</Name>
+    <Synchronization>Synchronous</Synchronization>
+    <Type>10001</Type>
+    <SequenceNumber>1000</SequenceNumber>
+    <Url/>
+    <Assembly>Microsoft.Office.DocumentManagement, Version=16.0.0.0, Culture=neutral, PublicKeyToken=71e9bce111e9429c</Assembly>
+    <Class>Microsoft.Office.DocumentManagement.Internal.DocIdHandler</Class>
+    <Data/>
+    <Filter/>
+  </Receiver>
+  <Receiver>
+    <Name>Document ID Generator</Name>
+    <Synchronization>Synchronous</Synchronization>
+    <Type>10002</Type>
+    <SequenceNumber>1001</SequenceNumber>
+    <Url/>
+    <Assembly>Microsoft.Office.DocumentManagement, Version=16.0.0.0, Culture=neutral, PublicKeyToken=71e9bce111e9429c</Assembly>
+    <Class>Microsoft.Office.DocumentManagement.Internal.DocIdHandler</Class>
+    <Data/>
+    <Filter/>
+  </Receiver>
+  <Receiver>
+    <Name>Document ID Generator</Name>
+    <Synchronization>Synchronous</Synchronization>
+    <Type>10004</Type>
+    <SequenceNumber>1002</SequenceNumber>
+    <Url/>
+    <Assembly>Microsoft.Office.DocumentManagement, Version=16.0.0.0, Culture=neutral, PublicKeyToken=71e9bce111e9429c</Assembly>
+    <Class>Microsoft.Office.DocumentManagement.Internal.DocIdHandler</Class>
+    <Data/>
+    <Filter/>
+  </Receiver>
+  <Receiver>
+    <Name>Document ID Generator</Name>
+    <Synchronization>Synchronous</Synchronization>
+    <Type>10006</Type>
+    <SequenceNumber>1003</SequenceNumber>
+    <Url/>
+    <Assembly>Microsoft.Office.DocumentManagement, Version=16.0.0.0, Culture=neutral, PublicKeyToken=71e9bce111e9429c</Assembly>
+    <Class>Microsoft.Office.DocumentManagement.Internal.DocIdHandler</Class>
+    <Data/>
+    <Filter/>
+  </Receiver>
+</spe:Receivers>
 </file>
 
 <file path=customXml/itemProps1.xml><?xml version="1.0" encoding="utf-8"?>
-<ds:datastoreItem xmlns:ds="http://schemas.openxmlformats.org/officeDocument/2006/customXml" ds:itemID="{54C592EF-85C1-482B-896B-DED434B6FCCC}">
+<ds:datastoreItem xmlns:ds="http://schemas.openxmlformats.org/officeDocument/2006/customXml" ds:itemID="{84EE72F3-C956-4A5B-833F-E761B5D8ACD8}">
   <ds:schemaRefs>
-    <ds:schemaRef ds:uri="http://schemas.microsoft.com/sharepoint/events"/>
+    <ds:schemaRef ds:uri="http://schemas.microsoft.com/sharepoint/v3/contenttype/forms"/>
   </ds:schemaRefs>
 </ds:datastoreItem>
 </file>
 
 <file path=customXml/itemProps2.xml><?xml version="1.0" encoding="utf-8"?>
-<ds:datastoreItem xmlns:ds="http://schemas.openxmlformats.org/officeDocument/2006/customXml" ds:itemID="{84EE72F3-C956-4A5B-833F-E761B5D8ACD8}">
+<ds:datastoreItem xmlns:ds="http://schemas.openxmlformats.org/officeDocument/2006/customXml" ds:itemID="{E71A463F-9F4B-47AC-91AA-3962FD8F3CE5}">
   <ds:schemaRefs>
-    <ds:schemaRef ds:uri="http://schemas.microsoft.com/sharepoint/v3/contenttype/forms"/>
+    <ds:schemaRef ds:uri="http://schemas.microsoft.com/office/2006/metadata/properties"/>
+    <ds:schemaRef ds:uri="http://schemas.microsoft.com/office/infopath/2007/PartnerControls"/>
+    <ds:schemaRef ds:uri="c7a77415-c4a3-4262-8430-671f3e8707b6"/>
+    <ds:schemaRef ds:uri="69a7259e-7a2c-42d5-bc84-25eccf0dce8b"/>
   </ds:schemaRefs>
 </ds:datastoreItem>
 </file>
@@ -41715,12 +41717,9 @@
 </file>
 
 <file path=customXml/itemProps4.xml><?xml version="1.0" encoding="utf-8"?>
-<ds:datastoreItem xmlns:ds="http://schemas.openxmlformats.org/officeDocument/2006/customXml" ds:itemID="{E71A463F-9F4B-47AC-91AA-3962FD8F3CE5}">
+<ds:datastoreItem xmlns:ds="http://schemas.openxmlformats.org/officeDocument/2006/customXml" ds:itemID="{54C592EF-85C1-482B-896B-DED434B6FCCC}">
   <ds:schemaRefs>
-    <ds:schemaRef ds:uri="http://schemas.microsoft.com/office/2006/metadata/properties"/>
-    <ds:schemaRef ds:uri="http://schemas.microsoft.com/office/infopath/2007/PartnerControls"/>
-    <ds:schemaRef ds:uri="c7a77415-c4a3-4262-8430-671f3e8707b6"/>
-    <ds:schemaRef ds:uri="69a7259e-7a2c-42d5-bc84-25eccf0dce8b"/>
+    <ds:schemaRef ds:uri="http://schemas.microsoft.com/sharepoint/events"/>
   </ds:schemaRefs>
 </ds:datastoreItem>
 </file>